--- a/ppt/Python07-ComplexTypes.pptx
+++ b/ppt/Python07-ComplexTypes.pptx
@@ -11717,7 +11717,7 @@
             </a:pPr>
             <a:r>
               <a:rPr lang="en-GB" altLang="fr-FR" dirty="0"/>
-              <a:t>&gt;&gt;&gt;a = [‘spam’, ‘eggs’,100,1234]				  </a:t>
+              <a:t>a = [‘spam’, ‘eggs’,100,1234]				  </a:t>
             </a:r>
           </a:p>
           <a:p>
